--- a/task130/golden/trustees_paper_2027.pptx
+++ b/task130/golden/trustees_paper_2027.pptx
@@ -3117,7 +3117,7 @@
                   <a:srgbClr val="1F2F3F"/>
                 </a:solidFill>
               </a:rPr>
-              <a:t>2027 contribution to the Trust: $784,000</a:t>
+              <a:t>2027 contribution to the Trust: $587,000</a:t>
             </a:r>
           </a:p>
         </p:txBody>
@@ -3150,7 +3150,7 @@
                   <a:srgbClr val="5A6672"/>
                 </a:solidFill>
               </a:rPr>
-              <a:t>Recommended: the Participating Entities contribute $784,000 for 2027, the expected cost of the Claims that will be first made against the Trust in its first Plan Year</a:t>
+              <a:t>Recommended: the Participating Entities contribute $587,000 for 2027, the expected cost of the 10.2 Claims expected to be first made against the Trust in its first Plan Year</a:t>
             </a:r>
           </a:p>
         </p:txBody>
@@ -3290,7 +3290,7 @@
                             <a:srgbClr val="FFFFFF"/>
                           </a:solidFill>
                         </a:rPr>
-                        <a:t>Expected Claims</a:t>
+                        <a:t>Share</a:t>
                       </a:r>
                     </a:p>
                   </a:txBody>
@@ -3312,7 +3312,7 @@
                             <a:srgbClr val="FFFFFF"/>
                           </a:solidFill>
                         </a:rPr>
-                        <a:t>Expected cost ($)</a:t>
+                        <a:t>Pays ($)</a:t>
                       </a:r>
                     </a:p>
                   </a:txBody>
@@ -3378,7 +3378,7 @@
                             <a:srgbClr val="1F2F3F"/>
                           </a:solidFill>
                         </a:rPr>
-                        <a:t>100.2</a:t>
+                        <a:t>113.4</a:t>
                       </a:r>
                     </a:p>
                   </a:txBody>
@@ -3400,7 +3400,7 @@
                             <a:srgbClr val="1F2F3F"/>
                           </a:solidFill>
                         </a:rPr>
-                        <a:t>2.9</a:t>
+                        <a:t>18.9%</a:t>
                       </a:r>
                     </a:p>
                   </a:txBody>
@@ -3422,7 +3422,7 @@
                             <a:srgbClr val="1F2F3F"/>
                           </a:solidFill>
                         </a:rPr>
-                        <a:t>227,000</a:t>
+                        <a:t>111,000</a:t>
                       </a:r>
                     </a:p>
                   </a:txBody>
@@ -3488,7 +3488,7 @@
                             <a:srgbClr val="1F2F3F"/>
                           </a:solidFill>
                         </a:rPr>
-                        <a:t>175.6</a:t>
+                        <a:t>205.5</a:t>
                       </a:r>
                     </a:p>
                   </a:txBody>
@@ -3510,7 +3510,7 @@
                             <a:srgbClr val="1F2F3F"/>
                           </a:solidFill>
                         </a:rPr>
-                        <a:t>4.6</a:t>
+                        <a:t>34.3%</a:t>
                       </a:r>
                     </a:p>
                   </a:txBody>
@@ -3532,7 +3532,7 @@
                             <a:srgbClr val="1F2F3F"/>
                           </a:solidFill>
                         </a:rPr>
-                        <a:t>336,000</a:t>
+                        <a:t>201,000</a:t>
                       </a:r>
                     </a:p>
                   </a:txBody>
@@ -3598,7 +3598,7 @@
                             <a:srgbClr val="1F2F3F"/>
                           </a:solidFill>
                         </a:rPr>
-                        <a:t>264.9</a:t>
+                        <a:t>265.4</a:t>
                       </a:r>
                     </a:p>
                   </a:txBody>
@@ -3620,7 +3620,7 @@
                             <a:srgbClr val="1F2F3F"/>
                           </a:solidFill>
                         </a:rPr>
-                        <a:t>3.9</a:t>
+                        <a:t>44.2%</a:t>
                       </a:r>
                     </a:p>
                   </a:txBody>
@@ -3642,7 +3642,7 @@
                             <a:srgbClr val="1F2F3F"/>
                           </a:solidFill>
                         </a:rPr>
-                        <a:t>214,000</a:t>
+                        <a:t>260,000</a:t>
                       </a:r>
                     </a:p>
                   </a:txBody>
@@ -3708,7 +3708,7 @@
                             <a:srgbClr val="1F2F3F"/>
                           </a:solidFill>
                         </a:rPr>
-                        <a:t>15.1</a:t>
+                        <a:t>15.6</a:t>
                       </a:r>
                     </a:p>
                   </a:txBody>
@@ -3730,7 +3730,7 @@
                             <a:srgbClr val="1F2F3F"/>
                           </a:solidFill>
                         </a:rPr>
-                        <a:t>0.1</a:t>
+                        <a:t>2.6%</a:t>
                       </a:r>
                     </a:p>
                   </a:txBody>
@@ -3752,7 +3752,7 @@
                             <a:srgbClr val="1F2F3F"/>
                           </a:solidFill>
                         </a:rPr>
-                        <a:t>7,000</a:t>
+                        <a:t>15,000</a:t>
                       </a:r>
                     </a:p>
                   </a:txBody>
@@ -3818,7 +3818,7 @@
                             <a:srgbClr val="1F2F3F"/>
                           </a:solidFill>
                         </a:rPr>
-                        <a:t>555.8</a:t>
+                        <a:t>599.9</a:t>
                       </a:r>
                     </a:p>
                   </a:txBody>
@@ -3840,7 +3840,7 @@
                             <a:srgbClr val="1F2F3F"/>
                           </a:solidFill>
                         </a:rPr>
-                        <a:t>11.5</a:t>
+                        <a:t>100.0%</a:t>
                       </a:r>
                     </a:p>
                   </a:txBody>
@@ -3862,7 +3862,7 @@
                             <a:srgbClr val="1F2F3F"/>
                           </a:solidFill>
                         </a:rPr>
-                        <a:t>784,000</a:t>
+                        <a:t>587,000</a:t>
                       </a:r>
                     </a:p>
                   </a:txBody>
@@ -3905,7 +3905,7 @@
                   <a:srgbClr val="5A6672"/>
                 </a:solidFill>
               </a:rPr>
-              <a:t>Each entity joins on the day its occurrence policy expires, and the Trust is claims-made with each entity's Transition Date as its Retroactive Date: in 2027 it pays only for Claims made by 31 December from incidents after the entity joined.</a:t>
+              <a:t>The Trust is claims-made and each entity's Transition Date is its Retroactive Date: in 2027 it pays only for Claims made by 31 December from incidents after the entity joined, so the first year catches mostly the requests patients bring within months of their care.</a:t>
             </a:r>
           </a:p>
           <a:p>
@@ -3915,7 +3915,7 @@
                   <a:srgbClr val="5A6672"/>
                 </a:solidFill>
               </a:rPr>
-              <a:t>In the System's 2017 to 2024 experience the Claims made within a few months of their incident settled small, and most of the cost sits in Claims made a year or more after it. Costed claim by claim on that experience, the first year is a fraction of a mature year's cost.</a:t>
+              <a:t>From its Transition Date every entity's patients can come through the Early Resolution Program, which has served only Tolliver Falls and Alderwick. The window is costed on those hospitals' experience, one rate per specialty class for all four entities; on the System's pooled experience it would be about half.</a:t>
             </a:r>
           </a:p>
           <a:p>
@@ -3925,7 +3925,7 @@
                   <a:srgbClr val="5A6672"/>
                 </a:solidFill>
               </a:rPr>
-              <a:t>No provision for expenses, investment income, excess insurance or margin (funding policy 3.5).</a:t>
+              <a:t>Shares follow the 2027 exposure (funding policy section 2). No provision for expenses, investment income, excess insurance or margin (3.6).</a:t>
             </a:r>
           </a:p>
         </p:txBody>
@@ -4099,7 +4099,7 @@
                   <a:srgbClr val="5A6672"/>
                 </a:solidFill>
               </a:rPr>
-              <a:t>Source: risk management claims register valued 30 September 2026 (incidents 2017 to 2024, trended at 5.0% a year); clinician staffing plan 2027. Each entity counts from its Transition Date.</a:t>
+              <a:t>Source: risk management claims register valued 30 September 2026 (Tolliver Falls and Alderwick incidents 2017 to 2024, trended at 5.0% a year); clinician staffing plan 2027. Each entity counts from its Transition Date.</a:t>
             </a:r>
           </a:p>
         </p:txBody>

--- a/task130/golden/trustees_paper_2027.pptx
+++ b/task130/golden/trustees_paper_2027.pptx
@@ -3117,7 +3117,7 @@
                   <a:srgbClr val="1F2F3F"/>
                 </a:solidFill>
               </a:rPr>
-              <a:t>2027 contribution to the Trust: $587,000</a:t>
+              <a:t>2027 contribution to the Trust: $784,000</a:t>
             </a:r>
           </a:p>
         </p:txBody>
@@ -3150,7 +3150,7 @@
                   <a:srgbClr val="5A6672"/>
                 </a:solidFill>
               </a:rPr>
-              <a:t>Recommended: the Participating Entities contribute $587,000 for 2027, the expected cost of the 10.2 Claims expected to be first made against the Trust in its first Plan Year</a:t>
+              <a:t>Recommended: the Participating Entities contribute $784,000 for 2027, the expected cost of the Claims that will be first made against the Trust in its first Plan Year</a:t>
             </a:r>
           </a:p>
         </p:txBody>
@@ -3290,7 +3290,7 @@
                             <a:srgbClr val="FFFFFF"/>
                           </a:solidFill>
                         </a:rPr>
-                        <a:t>Share</a:t>
+                        <a:t>Expected Claims</a:t>
                       </a:r>
                     </a:p>
                   </a:txBody>
@@ -3312,7 +3312,7 @@
                             <a:srgbClr val="FFFFFF"/>
                           </a:solidFill>
                         </a:rPr>
-                        <a:t>Pays ($)</a:t>
+                        <a:t>Expected cost ($)</a:t>
                       </a:r>
                     </a:p>
                   </a:txBody>
@@ -3378,7 +3378,7 @@
                             <a:srgbClr val="1F2F3F"/>
                           </a:solidFill>
                         </a:rPr>
-                        <a:t>113.4</a:t>
+                        <a:t>100.2</a:t>
                       </a:r>
                     </a:p>
                   </a:txBody>
@@ -3400,7 +3400,7 @@
                             <a:srgbClr val="1F2F3F"/>
                           </a:solidFill>
                         </a:rPr>
-                        <a:t>18.9%</a:t>
+                        <a:t>2.9</a:t>
                       </a:r>
                     </a:p>
                   </a:txBody>
@@ -3422,7 +3422,7 @@
                             <a:srgbClr val="1F2F3F"/>
                           </a:solidFill>
                         </a:rPr>
-                        <a:t>111,000</a:t>
+                        <a:t>227,000</a:t>
                       </a:r>
                     </a:p>
                   </a:txBody>
@@ -3488,7 +3488,7 @@
                             <a:srgbClr val="1F2F3F"/>
                           </a:solidFill>
                         </a:rPr>
-                        <a:t>205.5</a:t>
+                        <a:t>175.6</a:t>
                       </a:r>
                     </a:p>
                   </a:txBody>
@@ -3510,7 +3510,7 @@
                             <a:srgbClr val="1F2F3F"/>
                           </a:solidFill>
                         </a:rPr>
-                        <a:t>34.3%</a:t>
+                        <a:t>4.6</a:t>
                       </a:r>
                     </a:p>
                   </a:txBody>
@@ -3532,7 +3532,7 @@
                             <a:srgbClr val="1F2F3F"/>
                           </a:solidFill>
                         </a:rPr>
-                        <a:t>201,000</a:t>
+                        <a:t>336,000</a:t>
                       </a:r>
                     </a:p>
                   </a:txBody>
@@ -3598,7 +3598,7 @@
                             <a:srgbClr val="1F2F3F"/>
                           </a:solidFill>
                         </a:rPr>
-                        <a:t>265.4</a:t>
+                        <a:t>264.9</a:t>
                       </a:r>
                     </a:p>
                   </a:txBody>
@@ -3620,7 +3620,7 @@
                             <a:srgbClr val="1F2F3F"/>
                           </a:solidFill>
                         </a:rPr>
-                        <a:t>44.2%</a:t>
+                        <a:t>3.9</a:t>
                       </a:r>
                     </a:p>
                   </a:txBody>
@@ -3642,7 +3642,7 @@
                             <a:srgbClr val="1F2F3F"/>
                           </a:solidFill>
                         </a:rPr>
-                        <a:t>260,000</a:t>
+                        <a:t>214,000</a:t>
                       </a:r>
                     </a:p>
                   </a:txBody>
@@ -3708,7 +3708,7 @@
                             <a:srgbClr val="1F2F3F"/>
                           </a:solidFill>
                         </a:rPr>
-                        <a:t>15.6</a:t>
+                        <a:t>15.1</a:t>
                       </a:r>
                     </a:p>
                   </a:txBody>
@@ -3730,7 +3730,7 @@
                             <a:srgbClr val="1F2F3F"/>
                           </a:solidFill>
                         </a:rPr>
-                        <a:t>2.6%</a:t>
+                        <a:t>0.1</a:t>
                       </a:r>
                     </a:p>
                   </a:txBody>
@@ -3752,7 +3752,7 @@
                             <a:srgbClr val="1F2F3F"/>
                           </a:solidFill>
                         </a:rPr>
-                        <a:t>15,000</a:t>
+                        <a:t>7,000</a:t>
                       </a:r>
                     </a:p>
                   </a:txBody>
@@ -3818,7 +3818,7 @@
                             <a:srgbClr val="1F2F3F"/>
                           </a:solidFill>
                         </a:rPr>
-                        <a:t>599.9</a:t>
+                        <a:t>555.8</a:t>
                       </a:r>
                     </a:p>
                   </a:txBody>
@@ -3840,7 +3840,7 @@
                             <a:srgbClr val="1F2F3F"/>
                           </a:solidFill>
                         </a:rPr>
-                        <a:t>100.0%</a:t>
+                        <a:t>11.5</a:t>
                       </a:r>
                     </a:p>
                   </a:txBody>
@@ -3862,7 +3862,7 @@
                             <a:srgbClr val="1F2F3F"/>
                           </a:solidFill>
                         </a:rPr>
-                        <a:t>587,000</a:t>
+                        <a:t>784,000</a:t>
                       </a:r>
                     </a:p>
                   </a:txBody>
@@ -3905,7 +3905,7 @@
                   <a:srgbClr val="5A6672"/>
                 </a:solidFill>
               </a:rPr>
-              <a:t>The Trust is claims-made and each entity's Transition Date is its Retroactive Date: in 2027 it pays only for Claims made by 31 December from incidents after the entity joined, so the first year catches mostly the requests patients bring within months of their care.</a:t>
+              <a:t>Each entity joins on the day its occurrence policy expires, and the Trust is claims-made with each entity's Transition Date as its Retroactive Date: in 2027 it pays only for Claims made by 31 December from incidents after the entity joined.</a:t>
             </a:r>
           </a:p>
           <a:p>
@@ -3915,7 +3915,7 @@
                   <a:srgbClr val="5A6672"/>
                 </a:solidFill>
               </a:rPr>
-              <a:t>From its Transition Date every entity's patients can come through the Early Resolution Program, which has served only Tolliver Falls and Alderwick. The window is costed on those hospitals' experience, one rate per specialty class for all four entities; on the System's pooled experience it would be about half.</a:t>
+              <a:t>In the System's 2017 to 2024 experience the Claims made within a few months of their incident settled small, and most of the cost sits in Claims made a year or more after it. Costed claim by claim on that experience, the first year is a fraction of a mature year's cost.</a:t>
             </a:r>
           </a:p>
           <a:p>
@@ -3925,7 +3925,7 @@
                   <a:srgbClr val="5A6672"/>
                 </a:solidFill>
               </a:rPr>
-              <a:t>Shares follow the 2027 exposure (funding policy section 2). No provision for expenses, investment income, excess insurance or margin (3.6).</a:t>
+              <a:t>No provision for expenses, investment income, excess insurance or margin (funding policy 3.5).</a:t>
             </a:r>
           </a:p>
         </p:txBody>
@@ -4099,7 +4099,7 @@
                   <a:srgbClr val="5A6672"/>
                 </a:solidFill>
               </a:rPr>
-              <a:t>Source: risk management claims register valued 30 September 2026 (Tolliver Falls and Alderwick incidents 2017 to 2024, trended at 5.0% a year); clinician staffing plan 2027. Each entity counts from its Transition Date.</a:t>
+              <a:t>Source: risk management claims register valued 30 September 2026 (incidents 2017 to 2024, trended at 5.0% a year); clinician staffing plan 2027. Each entity counts from its Transition Date.</a:t>
             </a:r>
           </a:p>
         </p:txBody>

--- a/task130/golden/trustees_paper_2027.pptx
+++ b/task130/golden/trustees_paper_2027.pptx
@@ -3117,7 +3117,7 @@
                   <a:srgbClr val="1F2F3F"/>
                 </a:solidFill>
               </a:rPr>
-              <a:t>2027 contribution to the Trust: $784,000</a:t>
+              <a:t>2027 contribution to the Trust: $1,250,000</a:t>
             </a:r>
           </a:p>
         </p:txBody>
@@ -3150,7 +3150,7 @@
                   <a:srgbClr val="5A6672"/>
                 </a:solidFill>
               </a:rPr>
-              <a:t>Recommended: the Participating Entities contribute $784,000 for 2027, the expected cost of the Claims that will be first made against the Trust in its first Plan Year</a:t>
+              <a:t>Recommended: the Participating Entities contribute $1,250,000 for 2027, the expected cost of the Claims that will be first made against the Trust in its first Plan Year</a:t>
             </a:r>
           </a:p>
         </p:txBody>
@@ -3198,7 +3198,7 @@
         </p:nvGraphicFramePr>
         <p:xfrm>
           <a:off x="576000" y="1548000"/>
-          <a:ext cx="10871997" cy="2051999"/>
+          <a:ext cx="8424000" cy="1710000"/>
         </p:xfrm>
         <a:graphic>
           <a:graphicData uri="http://schemas.openxmlformats.org/drawingml/2006/table">
@@ -3207,13 +3207,11 @@
                 <a:tableStyleId>{5C22544A-7EE6-4342-B048-85BDC9FD1C3A}</a:tableStyleId>
               </a:tblPr>
               <a:tblGrid>
-                <a:gridCol w="3024000"/>
-                <a:gridCol w="2015999"/>
-                <a:gridCol w="2160000"/>
-                <a:gridCol w="1655999"/>
-                <a:gridCol w="2015999"/>
+                <a:gridCol w="3384000"/>
+                <a:gridCol w="2304000"/>
+                <a:gridCol w="2736000"/>
               </a:tblGrid>
-              <a:tr h="341999">
+              <a:tr h="342000">
                 <a:tc>
                   <a:txBody>
                     <a:bodyPr/>
@@ -3268,51 +3266,7 @@
                             <a:srgbClr val="FFFFFF"/>
                           </a:solidFill>
                         </a:rPr>
-                        <a:t>Covered FTE-years, 2027</a:t>
-                      </a:r>
-                    </a:p>
-                  </a:txBody>
-                  <a:tcPr>
-                    <a:solidFill>
-                      <a:srgbClr val="1F2F3F"/>
-                    </a:solidFill>
-                  </a:tcPr>
-                </a:tc>
-                <a:tc>
-                  <a:txBody>
-                    <a:bodyPr/>
-                    <a:lstStyle/>
-                    <a:p>
-                      <a:pPr algn="r"/>
-                      <a:r>
-                        <a:rPr sz="1100" b="1">
-                          <a:solidFill>
-                            <a:srgbClr val="FFFFFF"/>
-                          </a:solidFill>
-                        </a:rPr>
-                        <a:t>Expected Claims</a:t>
-                      </a:r>
-                    </a:p>
-                  </a:txBody>
-                  <a:tcPr>
-                    <a:solidFill>
-                      <a:srgbClr val="1F2F3F"/>
-                    </a:solidFill>
-                  </a:tcPr>
-                </a:tc>
-                <a:tc>
-                  <a:txBody>
-                    <a:bodyPr/>
-                    <a:lstStyle/>
-                    <a:p>
-                      <a:pPr algn="r"/>
-                      <a:r>
-                        <a:rPr sz="1100" b="1">
-                          <a:solidFill>
-                            <a:srgbClr val="FFFFFF"/>
-                          </a:solidFill>
-                        </a:rPr>
-                        <a:t>Expected cost ($)</a:t>
+                        <a:t>Months in the Trust in 2027</a:t>
                       </a:r>
                     </a:p>
                   </a:txBody>
@@ -3323,7 +3277,7 @@
                   </a:tcPr>
                 </a:tc>
               </a:tr>
-              <a:tr h="341999">
+              <a:tr h="342000">
                 <a:tc>
                   <a:txBody>
                     <a:bodyPr/>
@@ -3378,51 +3332,7 @@
                             <a:srgbClr val="1F2F3F"/>
                           </a:solidFill>
                         </a:rPr>
-                        <a:t>100.2</a:t>
-                      </a:r>
-                    </a:p>
-                  </a:txBody>
-                  <a:tcPr>
-                    <a:solidFill>
-                      <a:srgbClr val="FFFFFF"/>
-                    </a:solidFill>
-                  </a:tcPr>
-                </a:tc>
-                <a:tc>
-                  <a:txBody>
-                    <a:bodyPr/>
-                    <a:lstStyle/>
-                    <a:p>
-                      <a:pPr algn="r"/>
-                      <a:r>
-                        <a:rPr sz="1200" b="0">
-                          <a:solidFill>
-                            <a:srgbClr val="1F2F3F"/>
-                          </a:solidFill>
-                        </a:rPr>
-                        <a:t>2.9</a:t>
-                      </a:r>
-                    </a:p>
-                  </a:txBody>
-                  <a:tcPr>
-                    <a:solidFill>
-                      <a:srgbClr val="FFFFFF"/>
-                    </a:solidFill>
-                  </a:tcPr>
-                </a:tc>
-                <a:tc>
-                  <a:txBody>
-                    <a:bodyPr/>
-                    <a:lstStyle/>
-                    <a:p>
-                      <a:pPr algn="r"/>
-                      <a:r>
-                        <a:rPr sz="1200" b="0">
-                          <a:solidFill>
-                            <a:srgbClr val="1F2F3F"/>
-                          </a:solidFill>
-                        </a:rPr>
-                        <a:t>227,000</a:t>
+                        <a:t>12</a:t>
                       </a:r>
                     </a:p>
                   </a:txBody>
@@ -3433,7 +3343,7 @@
                   </a:tcPr>
                 </a:tc>
               </a:tr>
-              <a:tr h="341999">
+              <a:tr h="342000">
                 <a:tc>
                   <a:txBody>
                     <a:bodyPr/>
@@ -3488,51 +3398,7 @@
                             <a:srgbClr val="1F2F3F"/>
                           </a:solidFill>
                         </a:rPr>
-                        <a:t>175.6</a:t>
-                      </a:r>
-                    </a:p>
-                  </a:txBody>
-                  <a:tcPr>
-                    <a:solidFill>
-                      <a:srgbClr val="FFFFFF"/>
-                    </a:solidFill>
-                  </a:tcPr>
-                </a:tc>
-                <a:tc>
-                  <a:txBody>
-                    <a:bodyPr/>
-                    <a:lstStyle/>
-                    <a:p>
-                      <a:pPr algn="r"/>
-                      <a:r>
-                        <a:rPr sz="1200" b="0">
-                          <a:solidFill>
-                            <a:srgbClr val="1F2F3F"/>
-                          </a:solidFill>
-                        </a:rPr>
-                        <a:t>4.6</a:t>
-                      </a:r>
-                    </a:p>
-                  </a:txBody>
-                  <a:tcPr>
-                    <a:solidFill>
-                      <a:srgbClr val="FFFFFF"/>
-                    </a:solidFill>
-                  </a:tcPr>
-                </a:tc>
-                <a:tc>
-                  <a:txBody>
-                    <a:bodyPr/>
-                    <a:lstStyle/>
-                    <a:p>
-                      <a:pPr algn="r"/>
-                      <a:r>
-                        <a:rPr sz="1200" b="0">
-                          <a:solidFill>
-                            <a:srgbClr val="1F2F3F"/>
-                          </a:solidFill>
-                        </a:rPr>
-                        <a:t>336,000</a:t>
+                        <a:t>9</a:t>
                       </a:r>
                     </a:p>
                   </a:txBody>
@@ -3543,7 +3409,7 @@
                   </a:tcPr>
                 </a:tc>
               </a:tr>
-              <a:tr h="341999">
+              <a:tr h="342000">
                 <a:tc>
                   <a:txBody>
                     <a:bodyPr/>
@@ -3598,51 +3464,7 @@
                             <a:srgbClr val="1F2F3F"/>
                           </a:solidFill>
                         </a:rPr>
-                        <a:t>264.9</a:t>
-                      </a:r>
-                    </a:p>
-                  </a:txBody>
-                  <a:tcPr>
-                    <a:solidFill>
-                      <a:srgbClr val="FFFFFF"/>
-                    </a:solidFill>
-                  </a:tcPr>
-                </a:tc>
-                <a:tc>
-                  <a:txBody>
-                    <a:bodyPr/>
-                    <a:lstStyle/>
-                    <a:p>
-                      <a:pPr algn="r"/>
-                      <a:r>
-                        <a:rPr sz="1200" b="0">
-                          <a:solidFill>
-                            <a:srgbClr val="1F2F3F"/>
-                          </a:solidFill>
-                        </a:rPr>
-                        <a:t>3.9</a:t>
-                      </a:r>
-                    </a:p>
-                  </a:txBody>
-                  <a:tcPr>
-                    <a:solidFill>
-                      <a:srgbClr val="FFFFFF"/>
-                    </a:solidFill>
-                  </a:tcPr>
-                </a:tc>
-                <a:tc>
-                  <a:txBody>
-                    <a:bodyPr/>
-                    <a:lstStyle/>
-                    <a:p>
-                      <a:pPr algn="r"/>
-                      <a:r>
-                        <a:rPr sz="1200" b="0">
-                          <a:solidFill>
-                            <a:srgbClr val="1F2F3F"/>
-                          </a:solidFill>
-                        </a:rPr>
-                        <a:t>214,000</a:t>
+                        <a:t>6</a:t>
                       </a:r>
                     </a:p>
                   </a:txBody>
@@ -3653,7 +3475,7 @@
                   </a:tcPr>
                 </a:tc>
               </a:tr>
-              <a:tr h="341999">
+              <a:tr h="342000">
                 <a:tc>
                   <a:txBody>
                     <a:bodyPr/>
@@ -3708,51 +3530,7 @@
                             <a:srgbClr val="1F2F3F"/>
                           </a:solidFill>
                         </a:rPr>
-                        <a:t>15.1</a:t>
-                      </a:r>
-                    </a:p>
-                  </a:txBody>
-                  <a:tcPr>
-                    <a:solidFill>
-                      <a:srgbClr val="FFFFFF"/>
-                    </a:solidFill>
-                  </a:tcPr>
-                </a:tc>
-                <a:tc>
-                  <a:txBody>
-                    <a:bodyPr/>
-                    <a:lstStyle/>
-                    <a:p>
-                      <a:pPr algn="r"/>
-                      <a:r>
-                        <a:rPr sz="1200" b="0">
-                          <a:solidFill>
-                            <a:srgbClr val="1F2F3F"/>
-                          </a:solidFill>
-                        </a:rPr>
-                        <a:t>0.1</a:t>
-                      </a:r>
-                    </a:p>
-                  </a:txBody>
-                  <a:tcPr>
-                    <a:solidFill>
-                      <a:srgbClr val="FFFFFF"/>
-                    </a:solidFill>
-                  </a:tcPr>
-                </a:tc>
-                <a:tc>
-                  <a:txBody>
-                    <a:bodyPr/>
-                    <a:lstStyle/>
-                    <a:p>
-                      <a:pPr algn="r"/>
-                      <a:r>
-                        <a:rPr sz="1200" b="0">
-                          <a:solidFill>
-                            <a:srgbClr val="1F2F3F"/>
-                          </a:solidFill>
-                        </a:rPr>
-                        <a:t>7,000</a:t>
+                        <a:t>3</a:t>
                       </a:r>
                     </a:p>
                   </a:txBody>
@@ -3763,116 +3541,6 @@
                   </a:tcPr>
                 </a:tc>
               </a:tr>
-              <a:tr h="342004">
-                <a:tc>
-                  <a:txBody>
-                    <a:bodyPr/>
-                    <a:lstStyle/>
-                    <a:p>
-                      <a:r>
-                        <a:rPr sz="1200" b="1">
-                          <a:solidFill>
-                            <a:srgbClr val="1F2F3F"/>
-                          </a:solidFill>
-                        </a:rPr>
-                        <a:t>All entities</a:t>
-                      </a:r>
-                    </a:p>
-                  </a:txBody>
-                  <a:tcPr>
-                    <a:solidFill>
-                      <a:srgbClr val="EEF1F4"/>
-                    </a:solidFill>
-                  </a:tcPr>
-                </a:tc>
-                <a:tc>
-                  <a:txBody>
-                    <a:bodyPr/>
-                    <a:lstStyle/>
-                    <a:p>
-                      <a:r>
-                        <a:rPr sz="1200" b="1">
-                          <a:solidFill>
-                            <a:srgbClr val="1F2F3F"/>
-                          </a:solidFill>
-                        </a:rPr>
-                        <a:t/>
-                      </a:r>
-                    </a:p>
-                  </a:txBody>
-                  <a:tcPr>
-                    <a:solidFill>
-                      <a:srgbClr val="EEF1F4"/>
-                    </a:solidFill>
-                  </a:tcPr>
-                </a:tc>
-                <a:tc>
-                  <a:txBody>
-                    <a:bodyPr/>
-                    <a:lstStyle/>
-                    <a:p>
-                      <a:pPr algn="r"/>
-                      <a:r>
-                        <a:rPr sz="1200" b="1">
-                          <a:solidFill>
-                            <a:srgbClr val="1F2F3F"/>
-                          </a:solidFill>
-                        </a:rPr>
-                        <a:t>555.8</a:t>
-                      </a:r>
-                    </a:p>
-                  </a:txBody>
-                  <a:tcPr>
-                    <a:solidFill>
-                      <a:srgbClr val="EEF1F4"/>
-                    </a:solidFill>
-                  </a:tcPr>
-                </a:tc>
-                <a:tc>
-                  <a:txBody>
-                    <a:bodyPr/>
-                    <a:lstStyle/>
-                    <a:p>
-                      <a:pPr algn="r"/>
-                      <a:r>
-                        <a:rPr sz="1200" b="1">
-                          <a:solidFill>
-                            <a:srgbClr val="1F2F3F"/>
-                          </a:solidFill>
-                        </a:rPr>
-                        <a:t>11.5</a:t>
-                      </a:r>
-                    </a:p>
-                  </a:txBody>
-                  <a:tcPr>
-                    <a:solidFill>
-                      <a:srgbClr val="EEF1F4"/>
-                    </a:solidFill>
-                  </a:tcPr>
-                </a:tc>
-                <a:tc>
-                  <a:txBody>
-                    <a:bodyPr/>
-                    <a:lstStyle/>
-                    <a:p>
-                      <a:pPr algn="r"/>
-                      <a:r>
-                        <a:rPr sz="1200" b="1">
-                          <a:solidFill>
-                            <a:srgbClr val="1F2F3F"/>
-                          </a:solidFill>
-                        </a:rPr>
-                        <a:t>784,000</a:t>
-                      </a:r>
-                    </a:p>
-                  </a:txBody>
-                  <a:tcPr>
-                    <a:solidFill>
-                      <a:srgbClr val="EEF1F4"/>
-                    </a:solidFill>
-                  </a:tcPr>
-                </a:tc>
-              </a:tr>
             </a:tbl>
           </a:graphicData>
         </a:graphic>
@@ -3885,8 +3553,8 @@
         </p:nvSpPr>
         <p:spPr>
           <a:xfrm>
-            <a:off x="576000" y="3960000"/>
-            <a:ext cx="11016000" cy="2160000"/>
+            <a:off x="576000" y="3816000"/>
+            <a:ext cx="11016000" cy="2376000"/>
           </a:xfrm>
           <a:prstGeom prst="rect">
             <a:avLst/>
@@ -3905,7 +3573,7 @@
                   <a:srgbClr val="5A6672"/>
                 </a:solidFill>
               </a:rPr>
-              <a:t>Each entity joins on the day its occurrence policy expires, and the Trust is claims-made with each entity's Transition Date as its Retroactive Date: in 2027 it pays only for Claims made by 31 December from incidents after the entity joined.</a:t>
+              <a:t>The Trust is claims-made, each entity's Transition Date its Retroactive Date: in 2027 it pays only for the Claims made by 31 December from incidents after the entity joined.</a:t>
             </a:r>
           </a:p>
           <a:p>
@@ -3915,7 +3583,17 @@
                   <a:srgbClr val="5A6672"/>
                 </a:solidFill>
               </a:rPr>
-              <a:t>In the System's 2017 to 2024 experience the Claims made within a few months of their incident settled small, and most of the cost sits in Claims made a year or more after it. Costed claim by claim on that experience, the first year is a fraction of a mature year's cost.</a:t>
+              <a:t>Those are the Claims the System's experience makes within the year: harm disclosed and settled within weeks of the care, which is costly, and program requests a few months on, which settle small. The demands and suits that carry most of the experience's cost come a year or more after the care, after 2027 for every entity.</a:t>
+            </a:r>
+          </a:p>
+          <a:p>
+            <a:r>
+              <a:rPr sz="1200" b="0">
+                <a:solidFill>
+                  <a:srgbClr val="5A6672"/>
+                </a:solidFill>
+              </a:rPr>
+              <a:t>Each 2016 to 2024 experience Claim was costed at its own delay from incident to first making against the days each entity is in the Trust in 2027, within its specialty class.</a:t>
             </a:r>
           </a:p>
           <a:p>
@@ -3976,7 +3654,7 @@
                   <a:srgbClr val="1F2F3F"/>
                 </a:solidFill>
               </a:rPr>
-              <a:t>The 2027 cost builds through the year as each entity joins</a:t>
+              <a:t>Corvane Medical Group carries 58% of the covered clinician FTE the payroll paid in September</a:t>
             </a:r>
           </a:p>
         </p:txBody>
@@ -4009,7 +3687,7 @@
                   <a:srgbClr val="5A6672"/>
                 </a:solidFill>
               </a:rPr>
-              <a:t>Expected cost of the Claims made against the Trust in each month of 2027, by entity, $000 at 2027 cost level</a:t>
+              <a:t>Covered clinician FTE the payroll paid at each entity, July to September 2026 (HCM pay lines)</a:t>
             </a:r>
           </a:p>
         </p:txBody>
@@ -4099,7 +3777,7 @@
                   <a:srgbClr val="5A6672"/>
                 </a:solidFill>
               </a:rPr>
-              <a:t>Source: risk management claims register valued 30 September 2026 (incidents 2017 to 2024, trended at 5.0% a year); clinician staffing plan 2027. Each entity counts from its Transition Date.</a:t>
+              <a:t>Source: HCM clinician pay lines run 2 October 2026; hours paid over 173.33 a month at 1.0 FTE, residents' and fellows' additional positions left out, entity of the cost centre charged.</a:t>
             </a:r>
           </a:p>
         </p:txBody>

--- a/task130/golden/trustees_paper_2027.pptx
+++ b/task130/golden/trustees_paper_2027.pptx
@@ -3583,7 +3583,7 @@
                   <a:srgbClr val="5A6672"/>
                 </a:solidFill>
               </a:rPr>
-              <a:t>Those are the Claims the System's experience makes within the year: harm disclosed and settled within weeks of the care, which is costly, and program requests a few months on, which settle small. The demands and suits that carry most of the experience's cost come a year or more after the care, after 2027 for every entity.</a:t>
+              <a:t>Those are the Claims the System's experience makes within the year: harm the care team disclosed, settled within weeks of the care, which is costly, and program requests a few months on, which settle small. The demands and suits that carry most of the experience's cost come a year or more after the care, after 2027 for every entity.</a:t>
             </a:r>
           </a:p>
           <a:p>
@@ -3593,7 +3593,7 @@
                   <a:srgbClr val="5A6672"/>
                 </a:solidFill>
               </a:rPr>
-              <a:t>Each 2016 to 2024 experience Claim was costed at its own delay from incident to first making against the days each entity is in the Trust in 2027, within its specialty class.</a:t>
+              <a:t>The disclosure settlements began at each entity in 2019 and have run every year since, so the window is costed on each entity's experience from its first settlement to 2024, each Claim at its own delay from incident to first making against the days each entity is in the Trust in 2027, within its specialty class. The 2016 to 2018 years have none and would understate 2027.</a:t>
             </a:r>
           </a:p>
           <a:p>

--- a/task130/golden/trustees_paper_2027.pptx
+++ b/task130/golden/trustees_paper_2027.pptx
@@ -3583,7 +3583,7 @@
                   <a:srgbClr val="5A6672"/>
                 </a:solidFill>
               </a:rPr>
-              <a:t>Those are the Claims the System's experience makes within the year: harm the care team disclosed, settled within weeks of the care, which is costly, and program requests a few months on, which settle small. The demands and suits that carry most of the experience's cost come a year or more after the care, after 2027 for every entity.</a:t>
+              <a:t>Those are the Claims the System's experience makes within the year: harm disclosed and settled within weeks of the care, which is costly, and program requests a few months on, which settle small. The demands and suits that carry most of the experience's cost come a year or more after the care, after 2027 for every entity.</a:t>
             </a:r>
           </a:p>
           <a:p>
@@ -3593,7 +3593,7 @@
                   <a:srgbClr val="5A6672"/>
                 </a:solidFill>
               </a:rPr>
-              <a:t>The disclosure settlements began at each entity in 2019 and have run every year since, so the window is costed on each entity's experience from its first settlement to 2024, each Claim at its own delay from incident to first making against the days each entity is in the Trust in 2027, within its specialty class. The 2016 to 2018 years have none and would understate 2027.</a:t>
+              <a:t>Each 2016 to 2024 experience Claim was costed at its own delay from incident to first making against the days each entity is in the Trust in 2027, within its specialty class.</a:t>
             </a:r>
           </a:p>
           <a:p>
